--- a/presentation/Copino_UBP_Presentation_Final.pptx
+++ b/presentation/Copino_UBP_Presentation_Final.pptx
@@ -547,6 +547,360 @@
           <a:bodyPr/>
           <a:lstStyle/>
           <a:p>
+            <a:r>
+              <a:rPr lang="en-US" sz="1200" b="1" i="0" kern="1200" dirty="0">
+                <a:solidFill>
+                  <a:schemeClr val="tx1"/>
+                </a:solidFill>
+                <a:effectLst/>
+                <a:latin typeface="+mn-lt"/>
+                <a:ea typeface="+mn-ea"/>
+                <a:cs typeface="+mn-cs"/>
+              </a:rPr>
+              <a:t>Acquisition Cost (₱5,000 – ₱15,000 per client)</a:t>
+            </a:r>
+            <a:endParaRPr lang="en-US" sz="1200" b="0" i="0" kern="1200" dirty="0">
+              <a:solidFill>
+                <a:schemeClr val="tx1"/>
+              </a:solidFill>
+              <a:effectLst/>
+              <a:latin typeface="+mn-lt"/>
+              <a:ea typeface="+mn-ea"/>
+              <a:cs typeface="+mn-cs"/>
+            </a:endParaRPr>
+          </a:p>
+          <a:p>
+            <a:r>
+              <a:rPr lang="en-US" sz="1200" b="0" i="0" kern="1200" dirty="0">
+                <a:solidFill>
+                  <a:schemeClr val="tx1"/>
+                </a:solidFill>
+                <a:effectLst/>
+                <a:latin typeface="+mn-lt"/>
+                <a:ea typeface="+mn-ea"/>
+                <a:cs typeface="+mn-cs"/>
+              </a:rPr>
+              <a:t>Bain &amp; Company — </a:t>
+            </a:r>
+            <a:r>
+              <a:rPr lang="en-US" sz="1200" b="0" i="1" kern="1200" dirty="0">
+                <a:solidFill>
+                  <a:schemeClr val="tx1"/>
+                </a:solidFill>
+                <a:effectLst/>
+                <a:latin typeface="+mn-lt"/>
+                <a:ea typeface="+mn-ea"/>
+                <a:cs typeface="+mn-cs"/>
+              </a:rPr>
+              <a:t>The Value of Customer Loyalty</a:t>
+            </a:r>
+            <a:r>
+              <a:rPr lang="en-US" sz="1200" b="0" i="0" kern="1200" dirty="0">
+                <a:solidFill>
+                  <a:schemeClr val="tx1"/>
+                </a:solidFill>
+                <a:effectLst/>
+                <a:latin typeface="+mn-lt"/>
+                <a:ea typeface="+mn-ea"/>
+                <a:cs typeface="+mn-cs"/>
+              </a:rPr>
+              <a:t> (acquiring a new customer costs 5–25x more than retaining one)</a:t>
+            </a:r>
+          </a:p>
+          <a:p>
+            <a:r>
+              <a:rPr lang="en-US" sz="1200" b="0" i="0" kern="1200" dirty="0">
+                <a:solidFill>
+                  <a:schemeClr val="tx1"/>
+                </a:solidFill>
+                <a:effectLst/>
+                <a:latin typeface="+mn-lt"/>
+                <a:ea typeface="+mn-ea"/>
+                <a:cs typeface="+mn-cs"/>
+              </a:rPr>
+              <a:t>General banking industry benchmark</a:t>
+            </a:r>
+          </a:p>
+          <a:p>
+            <a:r>
+              <a:rPr lang="en-PH" sz="1200" b="0" i="0" kern="1200" dirty="0">
+                <a:solidFill>
+                  <a:schemeClr val="tx1"/>
+                </a:solidFill>
+                <a:effectLst/>
+                <a:latin typeface="+mn-lt"/>
+                <a:ea typeface="+mn-ea"/>
+                <a:cs typeface="+mn-cs"/>
+                <a:hlinkClick r:id="rId3"/>
+              </a:rPr>
+              <a:t>Source</a:t>
+            </a:r>
+            <a:r>
+              <a:rPr lang="en-PH" sz="1200" b="0" i="0" kern="1200">
+                <a:solidFill>
+                  <a:schemeClr val="tx1"/>
+                </a:solidFill>
+                <a:effectLst/>
+                <a:latin typeface="+mn-lt"/>
+                <a:ea typeface="+mn-ea"/>
+                <a:cs typeface="+mn-cs"/>
+                <a:hlinkClick r:id="rId3"/>
+              </a:rPr>
+              <a:t>: </a:t>
+            </a:r>
+            <a:r>
+              <a:rPr lang="en-PH" sz="1200" b="0" i="0" kern="1200">
+                <a:solidFill>
+                  <a:schemeClr val="tx1"/>
+                </a:solidFill>
+                <a:effectLst/>
+                <a:latin typeface="+mn-lt"/>
+                <a:ea typeface="+mn-ea"/>
+                <a:cs typeface="+mn-cs"/>
+              </a:rPr>
+              <a:t>https://hbr.org/1990/09/zero-defections-quality-comes-to-services</a:t>
+            </a:r>
+          </a:p>
+          <a:p>
+            <a:endParaRPr lang="en-US" sz="1200" b="0" i="0" kern="1200" dirty="0">
+              <a:solidFill>
+                <a:schemeClr val="tx1"/>
+              </a:solidFill>
+              <a:effectLst/>
+              <a:latin typeface="+mn-lt"/>
+              <a:ea typeface="+mn-ea"/>
+              <a:cs typeface="+mn-cs"/>
+            </a:endParaRPr>
+          </a:p>
+          <a:p>
+            <a:r>
+              <a:rPr lang="en-PH" sz="1200" b="1" i="0" kern="1200" dirty="0">
+                <a:solidFill>
+                  <a:schemeClr val="tx1"/>
+                </a:solidFill>
+                <a:effectLst/>
+                <a:latin typeface="+mn-lt"/>
+                <a:ea typeface="+mn-ea"/>
+                <a:cs typeface="+mn-cs"/>
+              </a:rPr>
+              <a:t>Customer Lifetime Value </a:t>
+            </a:r>
+            <a:r>
+              <a:rPr lang="en-US" sz="1200" b="1" i="0" kern="1200" dirty="0">
+                <a:solidFill>
+                  <a:schemeClr val="tx1"/>
+                </a:solidFill>
+                <a:effectLst/>
+                <a:latin typeface="+mn-lt"/>
+                <a:ea typeface="+mn-ea"/>
+                <a:cs typeface="+mn-cs"/>
+              </a:rPr>
+              <a:t>(₱30,000 – ₱60,000 CLV, ~₱9,000/yr net)</a:t>
+            </a:r>
+            <a:endParaRPr lang="en-US" sz="1200" b="0" i="0" kern="1200" dirty="0">
+              <a:solidFill>
+                <a:schemeClr val="tx1"/>
+              </a:solidFill>
+              <a:effectLst/>
+              <a:latin typeface="+mn-lt"/>
+              <a:ea typeface="+mn-ea"/>
+              <a:cs typeface="+mn-cs"/>
+            </a:endParaRPr>
+          </a:p>
+          <a:p>
+            <a:r>
+              <a:rPr lang="en-US" sz="1200" b="0" i="0" kern="1200" dirty="0">
+                <a:solidFill>
+                  <a:schemeClr val="tx1"/>
+                </a:solidFill>
+                <a:effectLst/>
+                <a:latin typeface="+mn-lt"/>
+                <a:ea typeface="+mn-ea"/>
+                <a:cs typeface="+mn-cs"/>
+              </a:rPr>
+              <a:t>Source: https://www.bsp.gov.ph/Media_And_Research/FSR/FSR2024.pdf</a:t>
+            </a:r>
+          </a:p>
+          <a:p>
+            <a:endParaRPr lang="en-US" sz="1200" b="0" i="0" kern="1200" dirty="0">
+              <a:solidFill>
+                <a:schemeClr val="tx1"/>
+              </a:solidFill>
+              <a:effectLst/>
+              <a:latin typeface="+mn-lt"/>
+              <a:ea typeface="+mn-ea"/>
+              <a:cs typeface="+mn-cs"/>
+            </a:endParaRPr>
+          </a:p>
+          <a:p>
+            <a:r>
+              <a:rPr lang="en-US" b="1" dirty="0"/>
+              <a:t>Net annual revenue per cardholder (</a:t>
+            </a:r>
+            <a:r>
+              <a:rPr lang="en-PH" dirty="0"/>
+              <a:t>~₱9,000 / yr)</a:t>
+            </a:r>
+            <a:endParaRPr lang="en-US" b="1" dirty="0"/>
+          </a:p>
+          <a:p>
+            <a:pPr marL="0" marR="0" lvl="0" indent="0" algn="l" defTabSz="914400" rtl="0" eaLnBrk="1" fontAlgn="auto" latinLnBrk="0" hangingPunct="1">
+              <a:lnSpc>
+                <a:spcPct val="100000"/>
+              </a:lnSpc>
+              <a:spcBef>
+                <a:spcPts val="0"/>
+              </a:spcBef>
+              <a:spcAft>
+                <a:spcPts val="0"/>
+              </a:spcAft>
+              <a:buClrTx/>
+              <a:buSzTx/>
+              <a:buFontTx/>
+              <a:buNone/>
+              <a:tabLst/>
+              <a:defRPr/>
+            </a:pPr>
+            <a:r>
+              <a:rPr lang="en-US" sz="1200" b="0" i="0" kern="1200" dirty="0">
+                <a:solidFill>
+                  <a:schemeClr val="tx1"/>
+                </a:solidFill>
+                <a:effectLst/>
+                <a:latin typeface="+mn-lt"/>
+                <a:ea typeface="+mn-ea"/>
+                <a:cs typeface="+mn-cs"/>
+              </a:rPr>
+              <a:t>Source: https://www.bsp.gov.ph/Media_And_Research/Consumer%20Finance%20Survey/CFS_2021.pdf</a:t>
+            </a:r>
+          </a:p>
+          <a:p>
+            <a:endParaRPr lang="en-US" sz="1200" b="0" i="0" kern="1200" dirty="0">
+              <a:solidFill>
+                <a:schemeClr val="tx1"/>
+              </a:solidFill>
+              <a:effectLst/>
+              <a:latin typeface="+mn-lt"/>
+              <a:ea typeface="+mn-ea"/>
+              <a:cs typeface="+mn-cs"/>
+            </a:endParaRPr>
+          </a:p>
+          <a:p>
+            <a:r>
+              <a:rPr lang="en-US" sz="1200" b="1" i="0" kern="1200" dirty="0">
+                <a:solidFill>
+                  <a:schemeClr val="tx1"/>
+                </a:solidFill>
+                <a:effectLst/>
+                <a:latin typeface="+mn-lt"/>
+                <a:ea typeface="+mn-ea"/>
+                <a:cs typeface="+mn-cs"/>
+              </a:rPr>
+              <a:t>Retention Program Success Rate (40%)</a:t>
+            </a:r>
+            <a:endParaRPr lang="en-US" sz="1200" b="0" i="0" kern="1200" dirty="0">
+              <a:solidFill>
+                <a:schemeClr val="tx1"/>
+              </a:solidFill>
+              <a:effectLst/>
+              <a:latin typeface="+mn-lt"/>
+              <a:ea typeface="+mn-ea"/>
+              <a:cs typeface="+mn-cs"/>
+            </a:endParaRPr>
+          </a:p>
+          <a:p>
+            <a:r>
+              <a:rPr lang="en-US" sz="1200" b="0" i="0" kern="1200" dirty="0">
+                <a:solidFill>
+                  <a:schemeClr val="tx1"/>
+                </a:solidFill>
+                <a:effectLst/>
+                <a:latin typeface="+mn-lt"/>
+                <a:ea typeface="+mn-ea"/>
+                <a:cs typeface="+mn-cs"/>
+              </a:rPr>
+              <a:t>Bain &amp; Company — proactive retention interventions in financial services typically convert 30–50% of at-risk customers</a:t>
+            </a:r>
+          </a:p>
+          <a:p>
+            <a:r>
+              <a:rPr lang="en-US" sz="1200" b="1" i="0" kern="1200" dirty="0">
+                <a:solidFill>
+                  <a:schemeClr val="tx1"/>
+                </a:solidFill>
+                <a:effectLst/>
+                <a:latin typeface="+mn-lt"/>
+                <a:ea typeface="+mn-ea"/>
+                <a:cs typeface="+mn-cs"/>
+              </a:rPr>
+              <a:t>The ₱6,950,000 net EV figure</a:t>
+            </a:r>
+            <a:r>
+              <a:rPr lang="en-US" sz="1200" b="0" i="0" kern="1200" dirty="0">
+                <a:solidFill>
+                  <a:schemeClr val="tx1"/>
+                </a:solidFill>
+                <a:effectLst/>
+                <a:latin typeface="+mn-lt"/>
+                <a:ea typeface="+mn-ea"/>
+                <a:cs typeface="+mn-cs"/>
+              </a:rPr>
+              <a:t> was derived from the formula we built:</a:t>
+            </a:r>
+          </a:p>
+          <a:p>
+            <a:r>
+              <a:rPr lang="en-US" sz="1200" b="0" i="0" kern="1200" dirty="0">
+                <a:solidFill>
+                  <a:schemeClr val="tx1"/>
+                </a:solidFill>
+                <a:effectLst/>
+                <a:latin typeface="+mn-lt"/>
+                <a:ea typeface="+mn-ea"/>
+                <a:cs typeface="+mn-cs"/>
+              </a:rPr>
+              <a:t>EV = (Predicted </a:t>
+            </a:r>
+            <a:r>
+              <a:rPr lang="en-US" sz="1200" b="0" i="0" kern="1200" dirty="0" err="1">
+                <a:solidFill>
+                  <a:schemeClr val="tx1"/>
+                </a:solidFill>
+                <a:effectLst/>
+                <a:latin typeface="+mn-lt"/>
+                <a:ea typeface="+mn-ea"/>
+                <a:cs typeface="+mn-cs"/>
+              </a:rPr>
+              <a:t>Attriters</a:t>
+            </a:r>
+            <a:r>
+              <a:rPr lang="en-US" sz="1200" b="0" i="0" kern="1200" dirty="0">
+                <a:solidFill>
+                  <a:schemeClr val="tx1"/>
+                </a:solidFill>
+                <a:effectLst/>
+                <a:latin typeface="+mn-lt"/>
+                <a:ea typeface="+mn-ea"/>
+                <a:cs typeface="+mn-cs"/>
+              </a:rPr>
+              <a:t> × Success Rate × CLV saved) − (Intervention Cost × Predicted </a:t>
+            </a:r>
+          </a:p>
+          <a:p>
+            <a:r>
+              <a:rPr lang="en-US" sz="1200" b="0" i="0" kern="1200" dirty="0">
+                <a:solidFill>
+                  <a:schemeClr val="tx1"/>
+                </a:solidFill>
+                <a:effectLst/>
+                <a:latin typeface="+mn-lt"/>
+                <a:ea typeface="+mn-ea"/>
+                <a:cs typeface="+mn-cs"/>
+              </a:rPr>
+              <a:t>Source: https://www.bain.com/insights/customer-loyalty-in-retail-banking-2013/</a:t>
+            </a:r>
+          </a:p>
+          <a:p>
             <a:endParaRPr lang="en-PH" dirty="0"/>
           </a:p>
         </p:txBody>
@@ -568,7 +922,7 @@
           <a:p>
             <a:fld id="{BA95E93F-2514-4B81-921C-6961CBA23D3B}" type="slidenum">
               <a:rPr lang="en-PH" smtClean="0"/>
-              <a:t>8</a:t>
+              <a:t>4</a:t>
             </a:fld>
             <a:endParaRPr lang="en-PH"/>
           </a:p>
@@ -577,7 +931,7 @@
     </p:spTree>
     <p:extLst>
       <p:ext uri="{BB962C8B-B14F-4D97-AF65-F5344CB8AC3E}">
-        <p14:creationId xmlns:p14="http://schemas.microsoft.com/office/powerpoint/2010/main" val="91428300"/>
+        <p14:creationId xmlns:p14="http://schemas.microsoft.com/office/powerpoint/2010/main" val="900019541"/>
       </p:ext>
     </p:extLst>
   </p:cSld>
@@ -631,6 +985,90 @@
           <a:bodyPr/>
           <a:lstStyle/>
           <a:p>
+            <a:endParaRPr lang="en-PH" dirty="0"/>
+          </a:p>
+        </p:txBody>
+      </p:sp>
+      <p:sp>
+        <p:nvSpPr>
+          <p:cNvPr id="4" name="Slide Number Placeholder 3"/>
+          <p:cNvSpPr>
+            <a:spLocks noGrp="1"/>
+          </p:cNvSpPr>
+          <p:nvPr>
+            <p:ph type="sldNum" sz="quarter" idx="5"/>
+          </p:nvPr>
+        </p:nvSpPr>
+        <p:spPr/>
+        <p:txBody>
+          <a:bodyPr/>
+          <a:lstStyle/>
+          <a:p>
+            <a:fld id="{BA95E93F-2514-4B81-921C-6961CBA23D3B}" type="slidenum">
+              <a:rPr lang="en-PH" smtClean="0"/>
+              <a:t>8</a:t>
+            </a:fld>
+            <a:endParaRPr lang="en-PH"/>
+          </a:p>
+        </p:txBody>
+      </p:sp>
+    </p:spTree>
+    <p:extLst>
+      <p:ext uri="{BB962C8B-B14F-4D97-AF65-F5344CB8AC3E}">
+        <p14:creationId xmlns:p14="http://schemas.microsoft.com/office/powerpoint/2010/main" val="91428300"/>
+      </p:ext>
+    </p:extLst>
+  </p:cSld>
+  <p:clrMapOvr>
+    <a:masterClrMapping/>
+  </p:clrMapOvr>
+</p:notes>
+</file>
+
+<file path=ppt/notesSlides/notesSlide3.xml><?xml version="1.0" encoding="utf-8"?>
+<p:notes xmlns:a="http://schemas.openxmlformats.org/drawingml/2006/main" xmlns:r="http://schemas.openxmlformats.org/officeDocument/2006/relationships" xmlns:p="http://schemas.openxmlformats.org/presentationml/2006/main">
+  <p:cSld>
+    <p:spTree>
+      <p:nvGrpSpPr>
+        <p:cNvPr id="1" name=""/>
+        <p:cNvGrpSpPr/>
+        <p:nvPr/>
+      </p:nvGrpSpPr>
+      <p:grpSpPr>
+        <a:xfrm>
+          <a:off x="0" y="0"/>
+          <a:ext cx="0" cy="0"/>
+          <a:chOff x="0" y="0"/>
+          <a:chExt cx="0" cy="0"/>
+        </a:xfrm>
+      </p:grpSpPr>
+      <p:sp>
+        <p:nvSpPr>
+          <p:cNvPr id="2" name="Slide Image Placeholder 1"/>
+          <p:cNvSpPr>
+            <a:spLocks noGrp="1" noRot="1" noChangeAspect="1"/>
+          </p:cNvSpPr>
+          <p:nvPr>
+            <p:ph type="sldImg"/>
+          </p:nvPr>
+        </p:nvSpPr>
+        <p:spPr/>
+      </p:sp>
+      <p:sp>
+        <p:nvSpPr>
+          <p:cNvPr id="3" name="Notes Placeholder 2"/>
+          <p:cNvSpPr>
+            <a:spLocks noGrp="1"/>
+          </p:cNvSpPr>
+          <p:nvPr>
+            <p:ph type="body" idx="1"/>
+          </p:nvPr>
+        </p:nvSpPr>
+        <p:spPr/>
+        <p:txBody>
+          <a:bodyPr/>
+          <a:lstStyle/>
+          <a:p>
             <a:pPr marL="0" marR="0" lvl="0" indent="0" algn="l" defTabSz="914400" rtl="0" eaLnBrk="1" fontAlgn="auto" latinLnBrk="0" hangingPunct="1">
               <a:lnSpc>
                 <a:spcPct val="100000"/>
@@ -705,7 +1143,7 @@
 </p:notes>
 </file>
 
-<file path=ppt/notesSlides/notesSlide3.xml><?xml version="1.0" encoding="utf-8"?>
+<file path=ppt/notesSlides/notesSlide4.xml><?xml version="1.0" encoding="utf-8"?>
 <p:notes xmlns:a="http://schemas.openxmlformats.org/drawingml/2006/main" xmlns:r="http://schemas.openxmlformats.org/officeDocument/2006/relationships" xmlns:p="http://schemas.openxmlformats.org/presentationml/2006/main">
   <p:cSld>
     <p:spTree>
